--- a/submission/final/GridResolve_AI_Submission_Deck.pptx
+++ b/submission/final/GridResolve_AI_Submission_Deck.pptx
@@ -11033,7 +11033,7 @@
                 </a:solidFill>
                 <a:latin typeface="Segoe UI"/>
               </a:rPr>
-              <a:t>handoff after the release</a:t>
+              <a:t>review package after the release</a:t>
             </a:r>
           </a:p>
         </p:txBody>
